--- a/slides/build/aula-04-vps-docker-kamal-e-deploy.pptx
+++ b/slides/build/aula-04-vps-docker-kamal-e-deploy.pptx
@@ -4130,7 +4130,7 @@
                 <a:cs typeface="Open Sans Extra Bold"/>
                 <a:sym typeface="Open Sans Extra Bold"/>
               </a:rPr>
-              <a:t>Ubuntu Server 24.04 LTS — x64 Gen2</a:t>
+              <a:t>Ubuntu Server 24.04 LTS: x64 Gen2</a:t>
             </a:r>
           </a:p>
           <a:p>
@@ -4770,7 +4770,7 @@
                 <a:cs typeface="Open Sans Extra Bold"/>
                 <a:sym typeface="Open Sans Extra Bold"/>
               </a:rPr>
-              <a:t>sigilo — fecho com a sua pública, só você abre</a:t>
+              <a:t>sigilo: fecho com a sua pública, só você abre</a:t>
             </a:r>
           </a:p>
           <a:p>
@@ -4791,7 +4791,7 @@
                 <a:cs typeface="Open Sans Extra Bold"/>
                 <a:sym typeface="Open Sans Extra Bold"/>
               </a:rPr>
-              <a:t>assinatura — fecho com a minha privada, todos conferem que fui eu</a:t>
+              <a:t>assinatura: fecho com a minha privada, todos conferem que fui eu</a:t>
             </a:r>
           </a:p>
         </p:txBody>
@@ -5786,7 +5786,7 @@
                 <a:cs typeface="Open Sans Extra Bold"/>
                 <a:sym typeface="Open Sans Extra Bold"/>
               </a:rPr>
-              <a:t>apt update / apt install — o gerenciador de pacotes</a:t>
+              <a:t>apt update / apt install: o gerenciador de pacotes</a:t>
             </a:r>
           </a:p>
           <a:p>
@@ -5807,7 +5807,7 @@
                 <a:cs typeface="Open Sans Extra Bold"/>
                 <a:sym typeface="Open Sans Extra Bold"/>
               </a:rPr>
-              <a:t>sudo — executar como root, uma vez</a:t>
+              <a:t>sudo: executar como root, uma vez</a:t>
             </a:r>
           </a:p>
           <a:p>
@@ -5828,7 +5828,7 @@
                 <a:cs typeface="Open Sans Extra Bold"/>
                 <a:sym typeface="Open Sans Extra Bold"/>
               </a:rPr>
-              <a:t>systemctl status / restart — serviços</a:t>
+              <a:t>systemctl status / restart: serviços</a:t>
             </a:r>
           </a:p>
           <a:p>
@@ -5849,7 +5849,7 @@
                 <a:cs typeface="Open Sans Extra Bold"/>
                 <a:sym typeface="Open Sans Extra Bold"/>
               </a:rPr>
-              <a:t>journalctl -u ssh — logs de um serviço</a:t>
+              <a:t>journalctl -u ssh: logs de um serviço</a:t>
             </a:r>
           </a:p>
           <a:p>
@@ -5870,7 +5870,7 @@
                 <a:cs typeface="Open Sans Extra Bold"/>
                 <a:sym typeface="Open Sans Extra Bold"/>
               </a:rPr>
-              <a:t>free -h e df -h — memória e disco</a:t>
+              <a:t>free -h e df -h: memória e disco</a:t>
             </a:r>
           </a:p>
           <a:p>
@@ -5891,7 +5891,7 @@
                 <a:cs typeface="Open Sans Extra Bold"/>
                 <a:sym typeface="Open Sans Extra Bold"/>
               </a:rPr>
-              <a:t>chmod 600 arquivo — só o dono lê e escreve</a:t>
+              <a:t>chmod 600 arquivo: só o dono lê e escreve</a:t>
             </a:r>
           </a:p>
         </p:txBody>
@@ -6169,7 +6169,7 @@
                 <a:cs typeface="Open Sans Extra Bold"/>
                 <a:sym typeface="Open Sans Extra Bold"/>
               </a:rPr>
-              <a:t>É o que o SSH EXIGE de uma chave privada — senão ele recusa usar.</a:t>
+              <a:t>É o que o SSH EXIGE de uma chave privada. Senão ele recusa usar.</a:t>
             </a:r>
           </a:p>
           <a:p>
@@ -12596,7 +12596,7 @@
                 <a:cs typeface="Open Sans Extra Bold"/>
                 <a:sym typeface="Open Sans Extra Bold"/>
               </a:rPr>
-              <a:t>scan_ruby — Brakeman e bundler-audit.</a:t>
+              <a:t>scan_ruby: Brakeman e bundler-audit.</a:t>
             </a:r>
           </a:p>
           <a:p>
@@ -12617,7 +12617,7 @@
                 <a:cs typeface="Open Sans Extra Bold"/>
                 <a:sym typeface="Open Sans Extra Bold"/>
               </a:rPr>
-              <a:t>lint — RuboCop.</a:t>
+              <a:t>lint: RuboCop.</a:t>
             </a:r>
           </a:p>
           <a:p>
@@ -12638,7 +12638,7 @@
                 <a:cs typeface="Open Sans Extra Bold"/>
                 <a:sym typeface="Open Sans Extra Bold"/>
               </a:rPr>
-              <a:t>test — bin/rails test contra um Postgres descartável.</a:t>
+              <a:t>test: bin/rails test contra um Postgres descartável.</a:t>
             </a:r>
           </a:p>
           <a:p>
@@ -15269,7 +15269,7 @@
                 <a:cs typeface="Open Sans Extra Bold"/>
                 <a:sym typeface="Open Sans Extra Bold"/>
               </a:rPr>
-              <a:t>Mesmo protocolo, mesmos verbos, mesmos cabeçalhos — só que fechado.</a:t>
+              <a:t>Mesmo protocolo, mesmos verbos, mesmos cabeçalhos, só que fechado.</a:t>
             </a:r>
           </a:p>
           <a:p>
@@ -16124,7 +16124,7 @@
                 <a:cs typeface="Open Sans Extra Bold"/>
                 <a:sym typeface="Open Sans Extra Bold"/>
               </a:rPr>
-              <a:t>É o kamal-proxy na sua VM — e o Cloudflare, uma camada antes.</a:t>
+              <a:t>É o kamal-proxy na sua VM: e o Cloudflare, uma camada antes.</a:t>
             </a:r>
           </a:p>
           <a:p>
@@ -16360,7 +16360,7 @@
                 <a:cs typeface="Open Sans Extra Bold"/>
                 <a:sym typeface="Open Sans Extra Bold"/>
               </a:rPr>
-              <a:t>Hospedagem compartilhada — você não controla nada.</a:t>
+              <a:t>Hospedagem compartilhada: você não controla nada.</a:t>
             </a:r>
           </a:p>
           <a:p>
@@ -16381,7 +16381,7 @@
                 <a:cs typeface="Open Sans Extra Bold"/>
                 <a:sym typeface="Open Sans Extra Bold"/>
               </a:rPr>
-              <a:t>PaaS (Heroku, Render, Fly) — controla o app, opera nada.</a:t>
+              <a:t>PaaS (Heroku, Render, Fly): controla o app, opera nada.</a:t>
             </a:r>
           </a:p>
           <a:p>
@@ -16423,7 +16423,7 @@
                 <a:cs typeface="Open Sans Extra Bold"/>
                 <a:sym typeface="Open Sans Extra Bold"/>
               </a:rPr>
-              <a:t>VPS — controla tudo, e opera tudo.</a:t>
+              <a:t>VPS: controla tudo, e opera tudo.</a:t>
             </a:r>
           </a:p>
           <a:p>
@@ -16444,7 +16444,7 @@
                 <a:cs typeface="Open Sans Extra Bold"/>
                 <a:sym typeface="Open Sans Extra Bold"/>
               </a:rPr>
-              <a:t>Kubernetes — controla tudo, em escala, e opera muito mais.</a:t>
+              <a:t>Kubernetes: controla tudo, em escala, e opera muito mais.</a:t>
             </a:r>
           </a:p>
         </p:txBody>
@@ -16659,7 +16659,7 @@
                 <a:cs typeface="Open Sans Extra Bold"/>
                 <a:sym typeface="Open Sans Extra Bold"/>
               </a:rPr>
-              <a:t>Proxy: Proxied — a nuvem laranja.</a:t>
+              <a:t>Proxy: Proxied, a nuvem laranja.</a:t>
             </a:r>
           </a:p>
           <a:p>
@@ -16916,7 +16916,7 @@
                 <a:cs typeface="Open Sans Extra Bold"/>
                 <a:sym typeface="Open Sans Extra Bold"/>
               </a:rPr>
-              <a:t>Flexible — Cloudflare → sua VM em TEXTO PURO. Não use.</a:t>
+              <a:t>Flexible: Cloudflare → sua VM em TEXTO PURO. Não use.</a:t>
             </a:r>
           </a:p>
           <a:p>
@@ -16937,7 +16937,7 @@
                 <a:cs typeface="Open Sans Extra Bold"/>
                 <a:sym typeface="Open Sans Extra Bold"/>
               </a:rPr>
-              <a:t>Full — criptografado, mas aceita certificado inválido.</a:t>
+              <a:t>Full: criptografado, mas aceita certificado inválido.</a:t>
             </a:r>
           </a:p>
           <a:p>
@@ -16958,7 +16958,7 @@
                 <a:cs typeface="Open Sans Extra Bold"/>
                 <a:sym typeface="Open Sans Extra Bold"/>
               </a:rPr>
-              <a:t>Full (strict) — criptografado E o certificado é validado.</a:t>
+              <a:t>Full (strict): criptografado E o certificado é validado.</a:t>
             </a:r>
           </a:p>
           <a:p>
@@ -17236,7 +17236,7 @@
                 <a:cs typeface="Open Sans Extra Bold"/>
                 <a:sym typeface="Open Sans Extra Bold"/>
               </a:rPr>
-              <a:t>Daria para tirar o proxy durante a emissão — mas expõe o IP</a:t>
+              <a:t>Daria para tirar o proxy durante a emissão, mas isso expõe o IP</a:t>
             </a:r>
           </a:p>
           <a:p>
@@ -19219,7 +19219,7 @@
                 <a:cs typeface="Open Sans Extra Bold"/>
                 <a:sym typeface="Open Sans Extra Bold"/>
               </a:rPr>
-              <a:t>Volume salva o dado do deploy — e ainda assim não é backup.</a:t>
+              <a:t>Volume salva o dado do deploy. E ainda assim não é backup.</a:t>
             </a:r>
           </a:p>
           <a:p>
@@ -19754,7 +19754,7 @@
                 <a:cs typeface="Open Sans Extra Bold"/>
                 <a:sym typeface="Open Sans Extra Bold"/>
               </a:rPr>
-              <a:t>Datadog — logs centralizados e Error Tracking.</a:t>
+              <a:t>Datadog: logs centralizados e Error Tracking.</a:t>
             </a:r>
           </a:p>
           <a:p>
@@ -19775,7 +19775,7 @@
                 <a:cs typeface="Open Sans Extra Bold"/>
                 <a:sym typeface="Open Sans Extra Bold"/>
               </a:rPr>
-              <a:t>rack-attack — bloqueia scanner e rajada de erro por IP.</a:t>
+              <a:t>rack-attack: bloqueia scanner e rajada de erro por IP.</a:t>
             </a:r>
           </a:p>
           <a:p>
@@ -19796,7 +19796,7 @@
                 <a:cs typeface="Open Sans Extra Bold"/>
                 <a:sym typeface="Open Sans Extra Bold"/>
               </a:rPr>
-              <a:t>Active Storage — foto de perfil em volume persistente.</a:t>
+              <a:t>Active Storage: foto de perfil em volume persistente.</a:t>
             </a:r>
           </a:p>
           <a:p>
@@ -19817,7 +19817,7 @@
                 <a:cs typeface="Open Sans Extra Bold"/>
                 <a:sym typeface="Open Sans Extra Bold"/>
               </a:rPr>
-              <a:t>Audit log — histórico de toda mutação de admin.</a:t>
+              <a:t>Audit log: histórico de toda mutação de admin.</a:t>
             </a:r>
           </a:p>
           <a:p>
@@ -20290,7 +20290,7 @@
                 <a:cs typeface="Open Sans Extra Bold"/>
                 <a:sym typeface="Open Sans Extra Bold"/>
               </a:rPr>
-              <a:t>O Postgres não é gerenciado — quem cuida é você.</a:t>
+              <a:t>O Postgres não é gerenciado: quem cuida é você.</a:t>
             </a:r>
           </a:p>
           <a:p>
